--- a/apps/shell/resources/builtin-skills/cheil-monthly-report/assets/월간 성과 보고서.pptx
+++ b/apps/shell/resources/builtin-skills/cheil-monthly-report/assets/월간 성과 보고서.pptx
@@ -3160,7 +3160,7 @@
                 </a:solidFill>
                 <a:latin typeface="맑은 고딕"/>
               </a:rPr>
-              <a:t>[광고주명] [월] 캠페인 성과 보고</a:t>
+              <a:t>[광고주] [캠페인명] [월] 성과 보고</a:t>
             </a:r>
           </a:p>
         </p:txBody>
@@ -3188,7 +3188,7 @@
                 </a:solidFill>
                 <a:latin typeface="맑은 고딕"/>
               </a:rPr>
-              <a:t>[보고일]  ·  [팀명]</a:t>
+              <a:t>[작성일]  ·  [팀명]</a:t>
             </a:r>
           </a:p>
         </p:txBody>
